--- a/ゲーム科3年/00_前期/ゲームエンジンⅤ/00_UnrealEngine導入.pptx
+++ b/ゲーム科3年/00_前期/ゲームエンジンⅤ/00_UnrealEngine導入.pptx
@@ -269,7 +269,7 @@
           <a:p>
             <a:fld id="{E9CC885B-4903-4D54-9A93-00025F12DED9}" type="datetimeFigureOut">
               <a:rPr kumimoji="1" lang="ja-JP" altLang="en-US" smtClean="0"/>
-              <a:t>2025/1/24</a:t>
+              <a:t>2025/11/7</a:t>
             </a:fld>
             <a:endParaRPr kumimoji="1" lang="ja-JP" altLang="en-US"/>
           </a:p>
@@ -499,7 +499,7 @@
           <a:p>
             <a:fld id="{E9CC885B-4903-4D54-9A93-00025F12DED9}" type="datetimeFigureOut">
               <a:rPr kumimoji="1" lang="ja-JP" altLang="en-US" smtClean="0"/>
-              <a:t>2025/1/24</a:t>
+              <a:t>2025/11/7</a:t>
             </a:fld>
             <a:endParaRPr kumimoji="1" lang="ja-JP" altLang="en-US"/>
           </a:p>
@@ -739,7 +739,7 @@
           <a:p>
             <a:fld id="{E9CC885B-4903-4D54-9A93-00025F12DED9}" type="datetimeFigureOut">
               <a:rPr kumimoji="1" lang="ja-JP" altLang="en-US" smtClean="0"/>
-              <a:t>2025/1/24</a:t>
+              <a:t>2025/11/7</a:t>
             </a:fld>
             <a:endParaRPr kumimoji="1" lang="ja-JP" altLang="en-US"/>
           </a:p>
@@ -969,7 +969,7 @@
           <a:p>
             <a:fld id="{E9CC885B-4903-4D54-9A93-00025F12DED9}" type="datetimeFigureOut">
               <a:rPr kumimoji="1" lang="ja-JP" altLang="en-US" smtClean="0"/>
-              <a:t>2025/1/24</a:t>
+              <a:t>2025/11/7</a:t>
             </a:fld>
             <a:endParaRPr kumimoji="1" lang="ja-JP" altLang="en-US"/>
           </a:p>
@@ -1244,7 +1244,7 @@
           <a:p>
             <a:fld id="{E9CC885B-4903-4D54-9A93-00025F12DED9}" type="datetimeFigureOut">
               <a:rPr kumimoji="1" lang="ja-JP" altLang="en-US" smtClean="0"/>
-              <a:t>2025/1/24</a:t>
+              <a:t>2025/11/7</a:t>
             </a:fld>
             <a:endParaRPr kumimoji="1" lang="ja-JP" altLang="en-US"/>
           </a:p>
@@ -1573,7 +1573,7 @@
           <a:p>
             <a:fld id="{E9CC885B-4903-4D54-9A93-00025F12DED9}" type="datetimeFigureOut">
               <a:rPr kumimoji="1" lang="ja-JP" altLang="en-US" smtClean="0"/>
-              <a:t>2025/1/24</a:t>
+              <a:t>2025/11/7</a:t>
             </a:fld>
             <a:endParaRPr kumimoji="1" lang="ja-JP" altLang="en-US"/>
           </a:p>
@@ -2049,7 +2049,7 @@
           <a:p>
             <a:fld id="{E9CC885B-4903-4D54-9A93-00025F12DED9}" type="datetimeFigureOut">
               <a:rPr kumimoji="1" lang="ja-JP" altLang="en-US" smtClean="0"/>
-              <a:t>2025/1/24</a:t>
+              <a:t>2025/11/7</a:t>
             </a:fld>
             <a:endParaRPr kumimoji="1" lang="ja-JP" altLang="en-US"/>
           </a:p>
@@ -2190,7 +2190,7 @@
           <a:p>
             <a:fld id="{E9CC885B-4903-4D54-9A93-00025F12DED9}" type="datetimeFigureOut">
               <a:rPr kumimoji="1" lang="ja-JP" altLang="en-US" smtClean="0"/>
-              <a:t>2025/1/24</a:t>
+              <a:t>2025/11/7</a:t>
             </a:fld>
             <a:endParaRPr kumimoji="1" lang="ja-JP" altLang="en-US"/>
           </a:p>
@@ -2303,7 +2303,7 @@
           <a:p>
             <a:fld id="{E9CC885B-4903-4D54-9A93-00025F12DED9}" type="datetimeFigureOut">
               <a:rPr kumimoji="1" lang="ja-JP" altLang="en-US" smtClean="0"/>
-              <a:t>2025/1/24</a:t>
+              <a:t>2025/11/7</a:t>
             </a:fld>
             <a:endParaRPr kumimoji="1" lang="ja-JP" altLang="en-US"/>
           </a:p>
@@ -2646,7 +2646,7 @@
           <a:p>
             <a:fld id="{E9CC885B-4903-4D54-9A93-00025F12DED9}" type="datetimeFigureOut">
               <a:rPr kumimoji="1" lang="ja-JP" altLang="en-US" smtClean="0"/>
-              <a:t>2025/1/24</a:t>
+              <a:t>2025/11/7</a:t>
             </a:fld>
             <a:endParaRPr kumimoji="1" lang="ja-JP" altLang="en-US"/>
           </a:p>
@@ -2934,7 +2934,7 @@
           <a:p>
             <a:fld id="{E9CC885B-4903-4D54-9A93-00025F12DED9}" type="datetimeFigureOut">
               <a:rPr kumimoji="1" lang="ja-JP" altLang="en-US" smtClean="0"/>
-              <a:t>2025/1/24</a:t>
+              <a:t>2025/11/7</a:t>
             </a:fld>
             <a:endParaRPr kumimoji="1" lang="ja-JP" altLang="en-US"/>
           </a:p>
@@ -3207,7 +3207,7 @@
           <a:p>
             <a:fld id="{E9CC885B-4903-4D54-9A93-00025F12DED9}" type="datetimeFigureOut">
               <a:rPr kumimoji="1" lang="ja-JP" altLang="en-US" smtClean="0"/>
-              <a:t>2025/1/24</a:t>
+              <a:t>2025/11/7</a:t>
             </a:fld>
             <a:endParaRPr kumimoji="1" lang="ja-JP" altLang="en-US"/>
           </a:p>
@@ -3736,7 +3736,15 @@
           <a:p>
             <a:r>
               <a:rPr lang="ja-JP" altLang="en-US" sz="2400" dirty="0"/>
-              <a:t>最近では特に家庭用ゲーム向けソフトによく使用されます。</a:t>
+              <a:t>最近では特に</a:t>
+            </a:r>
+            <a:r>
+              <a:rPr lang="ja-JP" altLang="en-US" sz="2400"/>
+              <a:t>家庭用ゲーム開発に</a:t>
+            </a:r>
+            <a:r>
+              <a:rPr lang="ja-JP" altLang="en-US" sz="2400" dirty="0"/>
+              <a:t>よく使用されます。</a:t>
             </a:r>
             <a:endParaRPr lang="en-US" altLang="ja-JP" sz="2400" dirty="0"/>
           </a:p>
